--- a/reports/03-rag-status.pptx
+++ b/reports/03-rag-status.pptx
@@ -107,7 +107,7 @@
   <p:extLst>
     <p:ext uri="{521415D9-36F7-43E2-AB2F-B90AF26B5E84}">
       <p14:sectionLst xmlns:p14="http://schemas.microsoft.com/office/powerpoint/2010/main">
-        <p14:section name="RAG status" id="{22b80bec-7931-f01f-49cd-5a81b6f1df85}">
+        <p14:section name="RAG status" id="{927d46e7-b889-b9a3-fc58-a291a7a52ad7}">
           <p14:sldIdLst>
             <p14:sldId id="256"/>
           </p14:sldIdLst>
